--- a/Week-3/Day-2/Snowflake_Modules_final.pptx
+++ b/Week-3/Day-2/Snowflake_Modules_final.pptx
@@ -6,28 +6,29 @@
   </p:sldMasterIdLst>
   <p:sldIdLst>
     <p:sldId id="256" r:id="rId2"/>
-    <p:sldId id="257" r:id="rId3"/>
-    <p:sldId id="258" r:id="rId4"/>
-    <p:sldId id="259" r:id="rId5"/>
-    <p:sldId id="260" r:id="rId6"/>
-    <p:sldId id="261" r:id="rId7"/>
-    <p:sldId id="262" r:id="rId8"/>
-    <p:sldId id="263" r:id="rId9"/>
-    <p:sldId id="264" r:id="rId10"/>
-    <p:sldId id="265" r:id="rId11"/>
-    <p:sldId id="266" r:id="rId12"/>
-    <p:sldId id="267" r:id="rId13"/>
-    <p:sldId id="268" r:id="rId14"/>
-    <p:sldId id="269" r:id="rId15"/>
-    <p:sldId id="270" r:id="rId16"/>
-    <p:sldId id="271" r:id="rId17"/>
-    <p:sldId id="272" r:id="rId18"/>
-    <p:sldId id="273" r:id="rId19"/>
-    <p:sldId id="274" r:id="rId20"/>
-    <p:sldId id="275" r:id="rId21"/>
-    <p:sldId id="276" r:id="rId22"/>
-    <p:sldId id="277" r:id="rId23"/>
-    <p:sldId id="278" r:id="rId24"/>
+    <p:sldId id="279" r:id="rId3"/>
+    <p:sldId id="257" r:id="rId4"/>
+    <p:sldId id="258" r:id="rId5"/>
+    <p:sldId id="259" r:id="rId6"/>
+    <p:sldId id="260" r:id="rId7"/>
+    <p:sldId id="261" r:id="rId8"/>
+    <p:sldId id="262" r:id="rId9"/>
+    <p:sldId id="263" r:id="rId10"/>
+    <p:sldId id="264" r:id="rId11"/>
+    <p:sldId id="265" r:id="rId12"/>
+    <p:sldId id="266" r:id="rId13"/>
+    <p:sldId id="267" r:id="rId14"/>
+    <p:sldId id="268" r:id="rId15"/>
+    <p:sldId id="269" r:id="rId16"/>
+    <p:sldId id="270" r:id="rId17"/>
+    <p:sldId id="271" r:id="rId18"/>
+    <p:sldId id="272" r:id="rId19"/>
+    <p:sldId id="273" r:id="rId20"/>
+    <p:sldId id="274" r:id="rId21"/>
+    <p:sldId id="275" r:id="rId22"/>
+    <p:sldId id="276" r:id="rId23"/>
+    <p:sldId id="277" r:id="rId24"/>
+    <p:sldId id="278" r:id="rId25"/>
   </p:sldIdLst>
   <p:sldSz cx="9144000" cy="6858000" type="screen4x3"/>
   <p:notesSz cx="6858000" cy="9144000"/>
@@ -6778,7 +6779,7 @@
           <a:p>
             <a:fld id="{5BCAD085-E8A6-8845-BD4E-CB4CCA059FC4}" type="datetimeFigureOut">
               <a:rPr lang="en-US" smtClean="0"/>
-              <a:t>4/13/2026</a:t>
+              <a:t>4/14/2026</a:t>
             </a:fld>
             <a:endParaRPr lang="en-US"/>
           </a:p>
@@ -6985,7 +6986,7 @@
           <a:p>
             <a:fld id="{5BCAD085-E8A6-8845-BD4E-CB4CCA059FC4}" type="datetimeFigureOut">
               <a:rPr lang="en-US" smtClean="0"/>
-              <a:t>4/13/2026</a:t>
+              <a:t>4/14/2026</a:t>
             </a:fld>
             <a:endParaRPr lang="en-US"/>
           </a:p>
@@ -7165,7 +7166,7 @@
           <a:p>
             <a:fld id="{5BCAD085-E8A6-8845-BD4E-CB4CCA059FC4}" type="datetimeFigureOut">
               <a:rPr lang="en-US" smtClean="0"/>
-              <a:t>4/13/2026</a:t>
+              <a:t>4/14/2026</a:t>
             </a:fld>
             <a:endParaRPr lang="en-US"/>
           </a:p>
@@ -7370,7 +7371,7 @@
           <a:p>
             <a:fld id="{5BCAD085-E8A6-8845-BD4E-CB4CCA059FC4}" type="datetimeFigureOut">
               <a:rPr lang="en-US" smtClean="0"/>
-              <a:t>4/13/2026</a:t>
+              <a:t>4/14/2026</a:t>
             </a:fld>
             <a:endParaRPr lang="en-US"/>
           </a:p>
@@ -14108,7 +14109,7 @@
           <a:p>
             <a:fld id="{5BCAD085-E8A6-8845-BD4E-CB4CCA059FC4}" type="datetimeFigureOut">
               <a:rPr lang="en-US" smtClean="0"/>
-              <a:t>4/13/2026</a:t>
+              <a:t>4/14/2026</a:t>
             </a:fld>
             <a:endParaRPr lang="en-US"/>
           </a:p>
@@ -14382,7 +14383,7 @@
           <a:p>
             <a:fld id="{5BCAD085-E8A6-8845-BD4E-CB4CCA059FC4}" type="datetimeFigureOut">
               <a:rPr lang="en-US" smtClean="0"/>
-              <a:t>4/13/2026</a:t>
+              <a:t>4/14/2026</a:t>
             </a:fld>
             <a:endParaRPr lang="en-US"/>
           </a:p>
@@ -14785,7 +14786,7 @@
           <a:p>
             <a:fld id="{5BCAD085-E8A6-8845-BD4E-CB4CCA059FC4}" type="datetimeFigureOut">
               <a:rPr lang="en-US" smtClean="0"/>
-              <a:t>4/13/2026</a:t>
+              <a:t>4/14/2026</a:t>
             </a:fld>
             <a:endParaRPr lang="en-US"/>
           </a:p>
@@ -14903,7 +14904,7 @@
           <a:p>
             <a:fld id="{5BCAD085-E8A6-8845-BD4E-CB4CCA059FC4}" type="datetimeFigureOut">
               <a:rPr lang="en-US" smtClean="0"/>
-              <a:t>4/13/2026</a:t>
+              <a:t>4/14/2026</a:t>
             </a:fld>
             <a:endParaRPr lang="en-US"/>
           </a:p>
@@ -14998,7 +14999,7 @@
           <a:p>
             <a:fld id="{5BCAD085-E8A6-8845-BD4E-CB4CCA059FC4}" type="datetimeFigureOut">
               <a:rPr lang="en-US" smtClean="0"/>
-              <a:t>4/13/2026</a:t>
+              <a:t>4/14/2026</a:t>
             </a:fld>
             <a:endParaRPr lang="en-US"/>
           </a:p>
@@ -15290,7 +15291,7 @@
           <a:p>
             <a:fld id="{5BCAD085-E8A6-8845-BD4E-CB4CCA059FC4}" type="datetimeFigureOut">
               <a:rPr lang="en-US" smtClean="0"/>
-              <a:t>4/13/2026</a:t>
+              <a:t>4/14/2026</a:t>
             </a:fld>
             <a:endParaRPr lang="en-US"/>
           </a:p>
@@ -15570,7 +15571,7 @@
           <a:p>
             <a:fld id="{5BCAD085-E8A6-8845-BD4E-CB4CCA059FC4}" type="datetimeFigureOut">
               <a:rPr lang="en-US" smtClean="0"/>
-              <a:t>4/13/2026</a:t>
+              <a:t>4/14/2026</a:t>
             </a:fld>
             <a:endParaRPr lang="en-US"/>
           </a:p>
@@ -15820,7 +15821,7 @@
           <a:p>
             <a:fld id="{5BCAD085-E8A6-8845-BD4E-CB4CCA059FC4}" type="datetimeFigureOut">
               <a:rPr lang="en-US" smtClean="0"/>
-              <a:t>4/13/2026</a:t>
+              <a:t>4/14/2026</a:t>
             </a:fld>
             <a:endParaRPr lang="en-US"/>
           </a:p>
@@ -16421,7 +16422,7 @@
           <a:lstStyle/>
           <a:p>
             <a:r>
-              <a:t>Warehouse Tuning</a:t>
+              <a:t>Query Optimization Techniques</a:t>
             </a:r>
           </a:p>
         </p:txBody>
@@ -16442,32 +16443,32 @@
           <a:lstStyle/>
           <a:p>
             <a:r>
-              <a:t>Scale UP → bigger queries</a:t>
-            </a:r>
-          </a:p>
-          <a:p>
-            <a:r>
-              <a:t>Scale OUT → concurrency</a:t>
-            </a:r>
-          </a:p>
-          <a:p>
-            <a:r>
-              <a:t>Use auto suspend/resume</a:t>
-            </a:r>
-          </a:p>
-          <a:p>
-            <a:r>
-              <a:t>Monitor credit usage</a:t>
-            </a:r>
-          </a:p>
-          <a:p>
-            <a:r>
-              <a:t>Choose correct size (XS to 4XL)</a:t>
-            </a:r>
-          </a:p>
-          <a:p>
-            <a:r>
-              <a:t>Use multi-cluster for heavy workloads</a:t>
+              <a:t>Avoid SELECT *</a:t>
+            </a:r>
+          </a:p>
+          <a:p>
+            <a:r>
+              <a:t>Filter early (WHERE clause)</a:t>
+            </a:r>
+          </a:p>
+          <a:p>
+            <a:r>
+              <a:t>Use proper JOIN conditions</a:t>
+            </a:r>
+          </a:p>
+          <a:p>
+            <a:r>
+              <a:t>Avoid cross joins</a:t>
+            </a:r>
+          </a:p>
+          <a:p>
+            <a:r>
+              <a:t>Use clustering keys</a:t>
+            </a:r>
+          </a:p>
+          <a:p>
+            <a:r>
+              <a:t>Minimize data movement</a:t>
             </a:r>
           </a:p>
         </p:txBody>
@@ -16513,7 +16514,7 @@
           <a:lstStyle/>
           <a:p>
             <a:r>
-              <a:t>Query Profile Analysis</a:t>
+              <a:t>Warehouse Tuning</a:t>
             </a:r>
           </a:p>
         </p:txBody>
@@ -16534,32 +16535,32 @@
           <a:lstStyle/>
           <a:p>
             <a:r>
-              <a:t>Use query profile UI</a:t>
-            </a:r>
-          </a:p>
-          <a:p>
-            <a:r>
-              <a:t>Identify slow steps</a:t>
-            </a:r>
-          </a:p>
-          <a:p>
-            <a:r>
-              <a:t>Check scan vs compute time</a:t>
-            </a:r>
-          </a:p>
-          <a:p>
-            <a:r>
-              <a:t>Analyze joins and aggregations</a:t>
-            </a:r>
-          </a:p>
-          <a:p>
-            <a:r>
-              <a:t>Validate partition pruning</a:t>
-            </a:r>
-          </a:p>
-          <a:p>
-            <a:r>
-              <a:t>Optimize based on bottlenecks</a:t>
+              <a:t>Scale UP → bigger queries</a:t>
+            </a:r>
+          </a:p>
+          <a:p>
+            <a:r>
+              <a:t>Scale OUT → concurrency</a:t>
+            </a:r>
+          </a:p>
+          <a:p>
+            <a:r>
+              <a:t>Use auto suspend/resume</a:t>
+            </a:r>
+          </a:p>
+          <a:p>
+            <a:r>
+              <a:t>Monitor credit usage</a:t>
+            </a:r>
+          </a:p>
+          <a:p>
+            <a:r>
+              <a:t>Choose correct size (XS to 4XL)</a:t>
+            </a:r>
+          </a:p>
+          <a:p>
+            <a:r>
+              <a:t>Use multi-cluster for heavy workloads</a:t>
             </a:r>
           </a:p>
         </p:txBody>
@@ -16605,8 +16606,7 @@
           <a:lstStyle/>
           <a:p>
             <a:r>
-              <a:rPr dirty="0"/>
-              <a:t>Data Sharing &amp; Governance</a:t>
+              <a:t>Query Profile Analysis</a:t>
             </a:r>
           </a:p>
         </p:txBody>
@@ -16627,22 +16627,32 @@
           <a:lstStyle/>
           <a:p>
             <a:r>
-              <a:t>Focus on secure data access</a:t>
-            </a:r>
-          </a:p>
-          <a:p>
-            <a:r>
-              <a:t>Enable collaboration without copying data</a:t>
-            </a:r>
-          </a:p>
-          <a:p>
-            <a:r>
-              <a:t>Apply governance policies</a:t>
-            </a:r>
-          </a:p>
-          <a:p>
-            <a:r>
-              <a:t>Ensure compliance and security</a:t>
+              <a:t>Use query profile UI</a:t>
+            </a:r>
+          </a:p>
+          <a:p>
+            <a:r>
+              <a:t>Identify slow steps</a:t>
+            </a:r>
+          </a:p>
+          <a:p>
+            <a:r>
+              <a:t>Check scan vs compute time</a:t>
+            </a:r>
+          </a:p>
+          <a:p>
+            <a:r>
+              <a:t>Analyze joins and aggregations</a:t>
+            </a:r>
+          </a:p>
+          <a:p>
+            <a:r>
+              <a:t>Validate partition pruning</a:t>
+            </a:r>
+          </a:p>
+          <a:p>
+            <a:r>
+              <a:t>Optimize based on bottlenecks</a:t>
             </a:r>
           </a:p>
         </p:txBody>
@@ -16688,7 +16698,8 @@
           <a:lstStyle/>
           <a:p>
             <a:r>
-              <a:t>Secure Data Sharing</a:t>
+              <a:rPr dirty="0"/>
+              <a:t>Data Sharing &amp; Governance</a:t>
             </a:r>
           </a:p>
         </p:txBody>
@@ -16709,27 +16720,22 @@
           <a:lstStyle/>
           <a:p>
             <a:r>
-              <a:t>Share data without duplication</a:t>
-            </a:r>
-          </a:p>
-          <a:p>
-            <a:r>
-              <a:t>Real-time access to shared datasets</a:t>
-            </a:r>
-          </a:p>
-          <a:p>
-            <a:r>
-              <a:t>No ETL required</a:t>
-            </a:r>
-          </a:p>
-          <a:p>
-            <a:r>
-              <a:t>Read-only access for consumers</a:t>
-            </a:r>
-          </a:p>
-          <a:p>
-            <a:r>
-              <a:t>Single source of truth</a:t>
+              <a:t>Focus on secure data access</a:t>
+            </a:r>
+          </a:p>
+          <a:p>
+            <a:r>
+              <a:t>Enable collaboration without copying data</a:t>
+            </a:r>
+          </a:p>
+          <a:p>
+            <a:r>
+              <a:t>Apply governance policies</a:t>
+            </a:r>
+          </a:p>
+          <a:p>
+            <a:r>
+              <a:t>Ensure compliance and security</a:t>
             </a:r>
           </a:p>
         </p:txBody>
@@ -16775,7 +16781,7 @@
           <a:lstStyle/>
           <a:p>
             <a:r>
-              <a:t>Cross-Account Sharing</a:t>
+              <a:t>Secure Data Sharing</a:t>
             </a:r>
           </a:p>
         </p:txBody>
@@ -16796,27 +16802,27 @@
           <a:lstStyle/>
           <a:p>
             <a:r>
-              <a:t>Share across Snowflake accounts</a:t>
-            </a:r>
-          </a:p>
-          <a:p>
-            <a:r>
-              <a:t>Supports different regions/clouds</a:t>
-            </a:r>
-          </a:p>
-          <a:p>
-            <a:r>
-              <a:t>Uses secure shares</a:t>
-            </a:r>
-          </a:p>
-          <a:p>
-            <a:r>
-              <a:t>Enables B2B collaboration</a:t>
-            </a:r>
-          </a:p>
-          <a:p>
-            <a:r>
-              <a:t>No data movement</a:t>
+              <a:t>Share data without duplication</a:t>
+            </a:r>
+          </a:p>
+          <a:p>
+            <a:r>
+              <a:t>Real-time access to shared datasets</a:t>
+            </a:r>
+          </a:p>
+          <a:p>
+            <a:r>
+              <a:t>No ETL required</a:t>
+            </a:r>
+          </a:p>
+          <a:p>
+            <a:r>
+              <a:t>Read-only access for consumers</a:t>
+            </a:r>
+          </a:p>
+          <a:p>
+            <a:r>
+              <a:t>Single source of truth</a:t>
             </a:r>
           </a:p>
         </p:txBody>
@@ -16862,7 +16868,7 @@
           <a:lstStyle/>
           <a:p>
             <a:r>
-              <a:t>Data Masking Policies</a:t>
+              <a:t>Cross-Account Sharing</a:t>
             </a:r>
           </a:p>
         </p:txBody>
@@ -16883,27 +16889,27 @@
           <a:lstStyle/>
           <a:p>
             <a:r>
-              <a:t>Dynamic data protection</a:t>
-            </a:r>
-          </a:p>
-          <a:p>
-            <a:r>
-              <a:t>Mask sensitive columns (PII)</a:t>
-            </a:r>
-          </a:p>
-          <a:p>
-            <a:r>
-              <a:t>Role-based masking</a:t>
-            </a:r>
-          </a:p>
-          <a:p>
-            <a:r>
-              <a:t>Applied at query runtime</a:t>
-            </a:r>
-          </a:p>
-          <a:p>
-            <a:r>
-              <a:t>Supports compliance (GDPR, HIPAA)</a:t>
+              <a:t>Share across Snowflake accounts</a:t>
+            </a:r>
+          </a:p>
+          <a:p>
+            <a:r>
+              <a:t>Supports different regions/clouds</a:t>
+            </a:r>
+          </a:p>
+          <a:p>
+            <a:r>
+              <a:t>Uses secure shares</a:t>
+            </a:r>
+          </a:p>
+          <a:p>
+            <a:r>
+              <a:t>Enables B2B collaboration</a:t>
+            </a:r>
+          </a:p>
+          <a:p>
+            <a:r>
+              <a:t>No data movement</a:t>
             </a:r>
           </a:p>
         </p:txBody>
@@ -16949,7 +16955,7 @@
           <a:lstStyle/>
           <a:p>
             <a:r>
-              <a:t>Row Access Policies</a:t>
+              <a:t>Data Masking Policies</a:t>
             </a:r>
           </a:p>
         </p:txBody>
@@ -16970,27 +16976,27 @@
           <a:lstStyle/>
           <a:p>
             <a:r>
-              <a:t>Row-level security</a:t>
-            </a:r>
-          </a:p>
-          <a:p>
-            <a:r>
-              <a:t>Filter rows based on role/user</a:t>
-            </a:r>
-          </a:p>
-          <a:p>
-            <a:r>
-              <a:t>Used in multi-tenant systems</a:t>
-            </a:r>
-          </a:p>
-          <a:p>
-            <a:r>
-              <a:t>Dynamic filtering logic</a:t>
-            </a:r>
-          </a:p>
-          <a:p>
-            <a:r>
-              <a:t>Enhances data privacy</a:t>
+              <a:t>Dynamic data protection</a:t>
+            </a:r>
+          </a:p>
+          <a:p>
+            <a:r>
+              <a:t>Mask sensitive columns (PII)</a:t>
+            </a:r>
+          </a:p>
+          <a:p>
+            <a:r>
+              <a:t>Role-based masking</a:t>
+            </a:r>
+          </a:p>
+          <a:p>
+            <a:r>
+              <a:t>Applied at query runtime</a:t>
+            </a:r>
+          </a:p>
+          <a:p>
+            <a:r>
+              <a:t>Supports compliance (GDPR, HIPAA)</a:t>
             </a:r>
           </a:p>
         </p:txBody>
@@ -17036,7 +17042,7 @@
           <a:lstStyle/>
           <a:p>
             <a:r>
-              <a:t>Governance Concepts</a:t>
+              <a:t>Row Access Policies</a:t>
             </a:r>
           </a:p>
         </p:txBody>
@@ -17057,32 +17063,27 @@
           <a:lstStyle/>
           <a:p>
             <a:r>
-              <a:t>Role-Based Access Control (RBAC)</a:t>
-            </a:r>
-          </a:p>
-          <a:p>
-            <a:r>
-              <a:t>Data lineage tracking</a:t>
-            </a:r>
-          </a:p>
-          <a:p>
-            <a:r>
-              <a:t>Audit logs</a:t>
-            </a:r>
-          </a:p>
-          <a:p>
-            <a:r>
-              <a:t>Data classification</a:t>
-            </a:r>
-          </a:p>
-          <a:p>
-            <a:r>
-              <a:t>Compliance enforcement</a:t>
-            </a:r>
-          </a:p>
-          <a:p>
-            <a:r>
-              <a:t>Centralized governance</a:t>
+              <a:t>Row-level security</a:t>
+            </a:r>
+          </a:p>
+          <a:p>
+            <a:r>
+              <a:t>Filter rows based on role/user</a:t>
+            </a:r>
+          </a:p>
+          <a:p>
+            <a:r>
+              <a:t>Used in multi-tenant systems</a:t>
+            </a:r>
+          </a:p>
+          <a:p>
+            <a:r>
+              <a:t>Dynamic filtering logic</a:t>
+            </a:r>
+          </a:p>
+          <a:p>
+            <a:r>
+              <a:t>Enhances data privacy</a:t>
             </a:r>
           </a:p>
         </p:txBody>
@@ -17128,8 +17129,7 @@
           <a:lstStyle/>
           <a:p>
             <a:r>
-              <a:rPr dirty="0"/>
-              <a:t>Advanced Concepts</a:t>
+              <a:t>Governance Concepts</a:t>
             </a:r>
           </a:p>
         </p:txBody>
@@ -17150,22 +17150,32 @@
           <a:lstStyle/>
           <a:p>
             <a:r>
-              <a:t>Focus on advanced architecture</a:t>
-            </a:r>
-          </a:p>
-          <a:p>
-            <a:r>
-              <a:t>Improve performance and cost</a:t>
-            </a:r>
-          </a:p>
-          <a:p>
-            <a:r>
-              <a:t>Adopt production best practices</a:t>
-            </a:r>
-          </a:p>
-          <a:p>
-            <a:r>
-              <a:t>Design scalable systems</a:t>
+              <a:t>Role-Based Access Control (RBAC)</a:t>
+            </a:r>
+          </a:p>
+          <a:p>
+            <a:r>
+              <a:t>Data lineage tracking</a:t>
+            </a:r>
+          </a:p>
+          <a:p>
+            <a:r>
+              <a:t>Audit logs</a:t>
+            </a:r>
+          </a:p>
+          <a:p>
+            <a:r>
+              <a:t>Data classification</a:t>
+            </a:r>
+          </a:p>
+          <a:p>
+            <a:r>
+              <a:t>Compliance enforcement</a:t>
+            </a:r>
+          </a:p>
+          <a:p>
+            <a:r>
+              <a:t>Centralized governance</a:t>
             </a:r>
           </a:p>
         </p:txBody>
@@ -17211,7 +17221,8 @@
           <a:lstStyle/>
           <a:p>
             <a:r>
-              <a:t>Data Sampling</a:t>
+              <a:rPr dirty="0"/>
+              <a:t>Advanced Concepts</a:t>
             </a:r>
           </a:p>
         </p:txBody>
@@ -17232,27 +17243,22 @@
           <a:lstStyle/>
           <a:p>
             <a:r>
-              <a:t>Retrieve subset of data</a:t>
-            </a:r>
-          </a:p>
-          <a:p>
-            <a:r>
-              <a:t>Useful for testing</a:t>
-            </a:r>
-          </a:p>
-          <a:p>
-            <a:r>
-              <a:t>Reduces cost</a:t>
-            </a:r>
-          </a:p>
-          <a:p>
-            <a:r>
-              <a:t>Supports random/system sampling</a:t>
-            </a:r>
-          </a:p>
-          <a:p>
-            <a:r>
-              <a:t>Speeds up development</a:t>
+              <a:t>Focus on advanced architecture</a:t>
+            </a:r>
+          </a:p>
+          <a:p>
+            <a:r>
+              <a:t>Improve performance and cost</a:t>
+            </a:r>
+          </a:p>
+          <a:p>
+            <a:r>
+              <a:t>Adopt production best practices</a:t>
+            </a:r>
+          </a:p>
+          <a:p>
+            <a:r>
+              <a:t>Design scalable systems</a:t>
             </a:r>
           </a:p>
         </p:txBody>
@@ -17284,7 +17290,13 @@
       </p:grpSpPr>
       <p:sp>
         <p:nvSpPr>
-          <p:cNvPr id="2" name="Title 1"/>
+          <p:cNvPr id="2" name="Title 1">
+            <a:extLst>
+              <a:ext uri="{FF2B5EF4-FFF2-40B4-BE49-F238E27FC236}">
+                <a16:creationId xmlns:a16="http://schemas.microsoft.com/office/drawing/2014/main" id="{E4B7EF64-A031-1BF0-8675-51B4BE481027}"/>
+              </a:ext>
+            </a:extLst>
+          </p:cNvPr>
           <p:cNvSpPr>
             <a:spLocks noGrp="1"/>
           </p:cNvSpPr>
@@ -17298,14 +17310,22 @@
           <a:lstStyle/>
           <a:p>
             <a:r>
-              <a:t>Query Result Cache</a:t>
-            </a:r>
+              <a:rPr lang="en-US" dirty="0"/>
+              <a:t>Cache</a:t>
+            </a:r>
+            <a:endParaRPr lang="en-IN" dirty="0"/>
           </a:p>
         </p:txBody>
       </p:sp>
       <p:sp>
         <p:nvSpPr>
-          <p:cNvPr id="3" name="Content Placeholder 2"/>
+          <p:cNvPr id="3" name="Content Placeholder 2">
+            <a:extLst>
+              <a:ext uri="{FF2B5EF4-FFF2-40B4-BE49-F238E27FC236}">
+                <a16:creationId xmlns:a16="http://schemas.microsoft.com/office/drawing/2014/main" id="{28C61669-66B6-2DED-8073-0D73D94715DD}"/>
+              </a:ext>
+            </a:extLst>
+          </p:cNvPr>
           <p:cNvSpPr>
             <a:spLocks noGrp="1"/>
           </p:cNvSpPr>
@@ -17315,41 +17335,93 @@
         </p:nvSpPr>
         <p:spPr/>
         <p:txBody>
-          <a:bodyPr/>
+          <a:bodyPr>
+            <a:normAutofit fontScale="92500" lnSpcReduction="20000"/>
+          </a:bodyPr>
           <a:lstStyle/>
           <a:p>
             <a:r>
-              <a:t>Stores complete query results</a:t>
-            </a:r>
-          </a:p>
-          <a:p>
-            <a:r>
-              <a:t>Triggered when identical query is executed</a:t>
-            </a:r>
-          </a:p>
-          <a:p>
-            <a:r>
-              <a:t>No compute cost for cached queries</a:t>
-            </a:r>
-          </a:p>
-          <a:p>
-            <a:r>
-              <a:t>Valid for 24 hours</a:t>
-            </a:r>
-          </a:p>
-          <a:p>
-            <a:r>
-              <a:t>Invalidated if underlying data changes</a:t>
-            </a:r>
-          </a:p>
-          <a:p>
-            <a:r>
-              <a:t>Best for dashboards and repeated queries</a:t>
-            </a:r>
+              <a:rPr lang="en-IN" b="1" dirty="0"/>
+              <a:t>Types of Cache</a:t>
+            </a:r>
+          </a:p>
+          <a:p>
+            <a:r>
+              <a:rPr lang="en-IN" b="1" dirty="0"/>
+              <a:t>Query Result Cache</a:t>
+            </a:r>
+            <a:r>
+              <a:rPr lang="en-IN" dirty="0"/>
+              <a:t> </a:t>
+            </a:r>
+          </a:p>
+          <a:p>
+            <a:r>
+              <a:rPr lang="en-IN" dirty="0"/>
+              <a:t>Stores final query results </a:t>
+            </a:r>
+          </a:p>
+          <a:p>
+            <a:r>
+              <a:rPr lang="en-IN" dirty="0"/>
+              <a:t>Returned instantly if same query is executed </a:t>
+            </a:r>
+          </a:p>
+          <a:p>
+            <a:r>
+              <a:rPr lang="en-IN" b="1" dirty="0"/>
+              <a:t>Metadata Cache</a:t>
+            </a:r>
+            <a:r>
+              <a:rPr lang="en-IN" dirty="0"/>
+              <a:t> </a:t>
+            </a:r>
+          </a:p>
+          <a:p>
+            <a:r>
+              <a:rPr lang="en-IN" dirty="0"/>
+              <a:t>Stores table statistics (min/max, partitions) </a:t>
+            </a:r>
+          </a:p>
+          <a:p>
+            <a:r>
+              <a:rPr lang="en-IN" dirty="0"/>
+              <a:t>Used for pruning </a:t>
+            </a:r>
+          </a:p>
+          <a:p>
+            <a:r>
+              <a:rPr lang="en-IN" b="1" dirty="0"/>
+              <a:t>Data Cache (Warehouse Cache)</a:t>
+            </a:r>
+            <a:r>
+              <a:rPr lang="en-IN" dirty="0"/>
+              <a:t> </a:t>
+            </a:r>
+          </a:p>
+          <a:p>
+            <a:r>
+              <a:rPr lang="en-IN" dirty="0"/>
+              <a:t>Stored in virtual warehouse memory </a:t>
+            </a:r>
+          </a:p>
+          <a:p>
+            <a:r>
+              <a:rPr lang="en-IN" dirty="0"/>
+              <a:t>Speeds up repeated scans</a:t>
+            </a:r>
+          </a:p>
+          <a:p>
+            <a:endParaRPr lang="en-IN" dirty="0"/>
           </a:p>
         </p:txBody>
       </p:sp>
     </p:spTree>
+    <p:extLst>
+      <p:ext uri="{BB962C8B-B14F-4D97-AF65-F5344CB8AC3E}">
+        <p14:creationId xmlns:p14="http://schemas.microsoft.com/office/powerpoint/2010/main" val="4267339346"/>
+      </p:ext>
+    </p:extLst>
   </p:cSld>
   <p:clrMapOvr>
     <a:masterClrMapping/>
@@ -17390,7 +17462,7 @@
           <a:lstStyle/>
           <a:p>
             <a:r>
-              <a:t>Container Services</a:t>
+              <a:t>Data Sampling</a:t>
             </a:r>
           </a:p>
         </p:txBody>
@@ -17411,27 +17483,27 @@
           <a:lstStyle/>
           <a:p>
             <a:r>
-              <a:t>Run container workloads</a:t>
-            </a:r>
-          </a:p>
-          <a:p>
-            <a:r>
-              <a:t>Supports ML models</a:t>
-            </a:r>
-          </a:p>
-          <a:p>
-            <a:r>
-              <a:t>Custom applications</a:t>
-            </a:r>
-          </a:p>
-          <a:p>
-            <a:r>
-              <a:t>Managed infrastructure</a:t>
-            </a:r>
-          </a:p>
-          <a:p>
-            <a:r>
-              <a:t>Integrated with Snowflake data</a:t>
+              <a:t>Retrieve subset of data</a:t>
+            </a:r>
+          </a:p>
+          <a:p>
+            <a:r>
+              <a:t>Useful for testing</a:t>
+            </a:r>
+          </a:p>
+          <a:p>
+            <a:r>
+              <a:t>Reduces cost</a:t>
+            </a:r>
+          </a:p>
+          <a:p>
+            <a:r>
+              <a:t>Supports random/system sampling</a:t>
+            </a:r>
+          </a:p>
+          <a:p>
+            <a:r>
+              <a:t>Speeds up development</a:t>
             </a:r>
           </a:p>
         </p:txBody>
@@ -17477,7 +17549,7 @@
           <a:lstStyle/>
           <a:p>
             <a:r>
-              <a:t>Advanced Best Practices</a:t>
+              <a:t>Container Services</a:t>
             </a:r>
           </a:p>
         </p:txBody>
@@ -17498,32 +17570,27 @@
           <a:lstStyle/>
           <a:p>
             <a:r>
-              <a:t>Use proper partitioning</a:t>
-            </a:r>
-          </a:p>
-          <a:p>
-            <a:r>
-              <a:t>Optimize joins and queries</a:t>
-            </a:r>
-          </a:p>
-          <a:p>
-            <a:r>
-              <a:t>Monitor workloads</a:t>
-            </a:r>
-          </a:p>
-          <a:p>
-            <a:r>
-              <a:t>Automate pipelines</a:t>
-            </a:r>
-          </a:p>
-          <a:p>
-            <a:r>
-              <a:t>Apply governance policies</a:t>
-            </a:r>
-          </a:p>
-          <a:p>
-            <a:r>
-              <a:t>Regular performance tuning</a:t>
+              <a:t>Run container workloads</a:t>
+            </a:r>
+          </a:p>
+          <a:p>
+            <a:r>
+              <a:t>Supports ML models</a:t>
+            </a:r>
+          </a:p>
+          <a:p>
+            <a:r>
+              <a:t>Custom applications</a:t>
+            </a:r>
+          </a:p>
+          <a:p>
+            <a:r>
+              <a:t>Managed infrastructure</a:t>
+            </a:r>
+          </a:p>
+          <a:p>
+            <a:r>
+              <a:t>Integrated with Snowflake data</a:t>
             </a:r>
           </a:p>
         </p:txBody>
@@ -17569,7 +17636,7 @@
           <a:lstStyle/>
           <a:p>
             <a:r>
-              <a:t>Cost Optimization</a:t>
+              <a:t>Advanced Best Practices</a:t>
             </a:r>
           </a:p>
         </p:txBody>
@@ -17590,32 +17657,32 @@
           <a:lstStyle/>
           <a:p>
             <a:r>
-              <a:t>Auto suspend warehouses</a:t>
-            </a:r>
-          </a:p>
-          <a:p>
-            <a:r>
-              <a:t>Use smallest effective size</a:t>
-            </a:r>
-          </a:p>
-          <a:p>
-            <a:r>
-              <a:t>Avoid unnecessary queries</a:t>
-            </a:r>
-          </a:p>
-          <a:p>
-            <a:r>
-              <a:t>Use caching effectively</a:t>
-            </a:r>
-          </a:p>
-          <a:p>
-            <a:r>
-              <a:t>Monitor credit usage</a:t>
-            </a:r>
-          </a:p>
-          <a:p>
-            <a:r>
-              <a:t>Optimize storage</a:t>
+              <a:t>Use proper partitioning</a:t>
+            </a:r>
+          </a:p>
+          <a:p>
+            <a:r>
+              <a:t>Optimize joins and queries</a:t>
+            </a:r>
+          </a:p>
+          <a:p>
+            <a:r>
+              <a:t>Monitor workloads</a:t>
+            </a:r>
+          </a:p>
+          <a:p>
+            <a:r>
+              <a:t>Automate pipelines</a:t>
+            </a:r>
+          </a:p>
+          <a:p>
+            <a:r>
+              <a:t>Apply governance policies</a:t>
+            </a:r>
+          </a:p>
+          <a:p>
+            <a:r>
+              <a:t>Regular performance tuning</a:t>
             </a:r>
           </a:p>
         </p:txBody>
@@ -17661,6 +17728,98 @@
           <a:lstStyle/>
           <a:p>
             <a:r>
+              <a:t>Cost Optimization</a:t>
+            </a:r>
+          </a:p>
+        </p:txBody>
+      </p:sp>
+      <p:sp>
+        <p:nvSpPr>
+          <p:cNvPr id="3" name="Content Placeholder 2"/>
+          <p:cNvSpPr>
+            <a:spLocks noGrp="1"/>
+          </p:cNvSpPr>
+          <p:nvPr>
+            <p:ph idx="1"/>
+          </p:nvPr>
+        </p:nvSpPr>
+        <p:spPr/>
+        <p:txBody>
+          <a:bodyPr/>
+          <a:lstStyle/>
+          <a:p>
+            <a:r>
+              <a:t>Auto suspend warehouses</a:t>
+            </a:r>
+          </a:p>
+          <a:p>
+            <a:r>
+              <a:t>Use smallest effective size</a:t>
+            </a:r>
+          </a:p>
+          <a:p>
+            <a:r>
+              <a:t>Avoid unnecessary queries</a:t>
+            </a:r>
+          </a:p>
+          <a:p>
+            <a:r>
+              <a:t>Use caching effectively</a:t>
+            </a:r>
+          </a:p>
+          <a:p>
+            <a:r>
+              <a:t>Monitor credit usage</a:t>
+            </a:r>
+          </a:p>
+          <a:p>
+            <a:r>
+              <a:t>Optimize storage</a:t>
+            </a:r>
+          </a:p>
+        </p:txBody>
+      </p:sp>
+    </p:spTree>
+  </p:cSld>
+  <p:clrMapOvr>
+    <a:masterClrMapping/>
+  </p:clrMapOvr>
+</p:sld>
+</file>
+
+<file path=ppt/slides/slide24.xml><?xml version="1.0" encoding="utf-8"?>
+<p:sld xmlns:a="http://schemas.openxmlformats.org/drawingml/2006/main" xmlns:r="http://schemas.openxmlformats.org/officeDocument/2006/relationships" xmlns:p="http://schemas.openxmlformats.org/presentationml/2006/main">
+  <p:cSld>
+    <p:spTree>
+      <p:nvGrpSpPr>
+        <p:cNvPr id="1" name=""/>
+        <p:cNvGrpSpPr/>
+        <p:nvPr/>
+      </p:nvGrpSpPr>
+      <p:grpSpPr>
+        <a:xfrm>
+          <a:off x="0" y="0"/>
+          <a:ext cx="0" cy="0"/>
+          <a:chOff x="0" y="0"/>
+          <a:chExt cx="0" cy="0"/>
+        </a:xfrm>
+      </p:grpSpPr>
+      <p:sp>
+        <p:nvSpPr>
+          <p:cNvPr id="2" name="Title 1"/>
+          <p:cNvSpPr>
+            <a:spLocks noGrp="1"/>
+          </p:cNvSpPr>
+          <p:nvPr>
+            <p:ph type="title"/>
+          </p:nvPr>
+        </p:nvSpPr>
+        <p:spPr/>
+        <p:txBody>
+          <a:bodyPr/>
+          <a:lstStyle/>
+          <a:p>
+            <a:r>
               <a:t>Production Architecture Patterns</a:t>
             </a:r>
           </a:p>
@@ -17753,7 +17912,7 @@
           <a:lstStyle/>
           <a:p>
             <a:r>
-              <a:t>Metadata Cache</a:t>
+              <a:t>Query Result Cache</a:t>
             </a:r>
           </a:p>
         </p:txBody>
@@ -17774,27 +17933,32 @@
           <a:lstStyle/>
           <a:p>
             <a:r>
-              <a:t>Caches schema, table structure, statistics</a:t>
-            </a:r>
-          </a:p>
-          <a:p>
-            <a:r>
-              <a:t>Used during query planning phase</a:t>
-            </a:r>
-          </a:p>
-          <a:p>
-            <a:r>
-              <a:t>Improves optimizer speed</a:t>
-            </a:r>
-          </a:p>
-          <a:p>
-            <a:r>
-              <a:t>Reduces compilation time</a:t>
-            </a:r>
-          </a:p>
-          <a:p>
-            <a:r>
-              <a:t>Automatically managed</a:t>
+              <a:t>Stores complete query results</a:t>
+            </a:r>
+          </a:p>
+          <a:p>
+            <a:r>
+              <a:t>Triggered when identical query is executed</a:t>
+            </a:r>
+          </a:p>
+          <a:p>
+            <a:r>
+              <a:t>No compute cost for cached queries</a:t>
+            </a:r>
+          </a:p>
+          <a:p>
+            <a:r>
+              <a:t>Valid for 24 hours</a:t>
+            </a:r>
+          </a:p>
+          <a:p>
+            <a:r>
+              <a:t>Invalidated if underlying data changes</a:t>
+            </a:r>
+          </a:p>
+          <a:p>
+            <a:r>
+              <a:t>Best for dashboards and repeated queries</a:t>
             </a:r>
           </a:p>
         </p:txBody>
@@ -17840,7 +18004,7 @@
           <a:lstStyle/>
           <a:p>
             <a:r>
-              <a:t>Data Cache</a:t>
+              <a:t>Metadata Cache</a:t>
             </a:r>
           </a:p>
         </p:txBody>
@@ -17861,27 +18025,27 @@
           <a:lstStyle/>
           <a:p>
             <a:r>
-              <a:t>Stored at warehouse level</a:t>
-            </a:r>
-          </a:p>
-          <a:p>
-            <a:r>
-              <a:t>Caches scanned data (micro-partitions)</a:t>
-            </a:r>
-          </a:p>
-          <a:p>
-            <a:r>
-              <a:t>Speeds up repeated queries</a:t>
-            </a:r>
-          </a:p>
-          <a:p>
-            <a:r>
-              <a:t>Lost when warehouse is suspended</a:t>
-            </a:r>
-          </a:p>
-          <a:p>
-            <a:r>
-              <a:t>Improves IO performance</a:t>
+              <a:t>Caches schema, table structure, statistics</a:t>
+            </a:r>
+          </a:p>
+          <a:p>
+            <a:r>
+              <a:t>Used during query planning phase</a:t>
+            </a:r>
+          </a:p>
+          <a:p>
+            <a:r>
+              <a:t>Improves optimizer speed</a:t>
+            </a:r>
+          </a:p>
+          <a:p>
+            <a:r>
+              <a:t>Reduces compilation time</a:t>
+            </a:r>
+          </a:p>
+          <a:p>
+            <a:r>
+              <a:t>Automatically managed</a:t>
             </a:r>
           </a:p>
         </p:txBody>
@@ -17927,7 +18091,7 @@
           <a:lstStyle/>
           <a:p>
             <a:r>
-              <a:t>Caching Flow Internals</a:t>
+              <a:t>Data Cache</a:t>
             </a:r>
           </a:p>
         </p:txBody>
@@ -17948,27 +18112,27 @@
           <a:lstStyle/>
           <a:p>
             <a:r>
-              <a:t>Step 1: Check result cache</a:t>
-            </a:r>
-          </a:p>
-          <a:p>
-            <a:r>
-              <a:t>Step 2: Check metadata cache</a:t>
-            </a:r>
-          </a:p>
-          <a:p>
-            <a:r>
-              <a:t>Step 3: Check data cache</a:t>
-            </a:r>
-          </a:p>
-          <a:p>
-            <a:r>
-              <a:t>Step 4: Execute query if no cache hit</a:t>
-            </a:r>
-          </a:p>
-          <a:p>
-            <a:r>
-              <a:t>Multi-layer optimization approach</a:t>
+              <a:t>Stored at warehouse level</a:t>
+            </a:r>
+          </a:p>
+          <a:p>
+            <a:r>
+              <a:t>Caches scanned data (micro-partitions)</a:t>
+            </a:r>
+          </a:p>
+          <a:p>
+            <a:r>
+              <a:t>Speeds up repeated queries</a:t>
+            </a:r>
+          </a:p>
+          <a:p>
+            <a:r>
+              <a:t>Lost when warehouse is suspended</a:t>
+            </a:r>
+          </a:p>
+          <a:p>
+            <a:r>
+              <a:t>Improves IO performance</a:t>
             </a:r>
           </a:p>
         </p:txBody>
@@ -18014,7 +18178,7 @@
           <a:lstStyle/>
           <a:p>
             <a:r>
-              <a:t>Cache Invalidation Rules</a:t>
+              <a:t>Caching Flow Internals</a:t>
             </a:r>
           </a:p>
         </p:txBody>
@@ -18035,27 +18199,27 @@
           <a:lstStyle/>
           <a:p>
             <a:r>
-              <a:t>INSERT/UPDATE/DELETE → result cache invalid</a:t>
-            </a:r>
-          </a:p>
-          <a:p>
-            <a:r>
-              <a:t>DDL changes → metadata cache invalid</a:t>
-            </a:r>
-          </a:p>
-          <a:p>
-            <a:r>
-              <a:t>Warehouse suspend → data cache cleared</a:t>
-            </a:r>
-          </a:p>
-          <a:p>
-            <a:r>
-              <a:t>Time expiry → 24-hour result cache</a:t>
-            </a:r>
-          </a:p>
-          <a:p>
-            <a:r>
-              <a:t>Role/session changes can impact cache usage</a:t>
+              <a:t>Step 1: Check result cache</a:t>
+            </a:r>
+          </a:p>
+          <a:p>
+            <a:r>
+              <a:t>Step 2: Check metadata cache</a:t>
+            </a:r>
+          </a:p>
+          <a:p>
+            <a:r>
+              <a:t>Step 3: Check data cache</a:t>
+            </a:r>
+          </a:p>
+          <a:p>
+            <a:r>
+              <a:t>Step 4: Execute query if no cache hit</a:t>
+            </a:r>
+          </a:p>
+          <a:p>
+            <a:r>
+              <a:t>Multi-layer optimization approach</a:t>
             </a:r>
           </a:p>
         </p:txBody>
@@ -18101,7 +18265,7 @@
           <a:lstStyle/>
           <a:p>
             <a:r>
-              <a:t>Clustering Keys</a:t>
+              <a:t>Cache Invalidation Rules</a:t>
             </a:r>
           </a:p>
         </p:txBody>
@@ -18122,32 +18286,27 @@
           <a:lstStyle/>
           <a:p>
             <a:r>
-              <a:t>Defines sort order inside micro-partitions</a:t>
-            </a:r>
-          </a:p>
-          <a:p>
-            <a:r>
-              <a:t>Improves partition pruning</a:t>
-            </a:r>
-          </a:p>
-          <a:p>
-            <a:r>
-              <a:t>Reduces data scanned</a:t>
-            </a:r>
-          </a:p>
-          <a:p>
-            <a:r>
-              <a:t>Best for large tables</a:t>
-            </a:r>
-          </a:p>
-          <a:p>
-            <a:r>
-              <a:t>Useful for range filters (dates, IDs)</a:t>
-            </a:r>
-          </a:p>
-          <a:p>
-            <a:r>
-              <a:t>Requires maintenance (reclustering)</a:t>
+              <a:t>INSERT/UPDATE/DELETE → result cache invalid</a:t>
+            </a:r>
+          </a:p>
+          <a:p>
+            <a:r>
+              <a:t>DDL changes → metadata cache invalid</a:t>
+            </a:r>
+          </a:p>
+          <a:p>
+            <a:r>
+              <a:t>Warehouse suspend → data cache cleared</a:t>
+            </a:r>
+          </a:p>
+          <a:p>
+            <a:r>
+              <a:t>Time expiry → 24-hour result cache</a:t>
+            </a:r>
+          </a:p>
+          <a:p>
+            <a:r>
+              <a:t>Role/session changes can impact cache usage</a:t>
             </a:r>
           </a:p>
         </p:txBody>
@@ -18193,7 +18352,7 @@
           <a:lstStyle/>
           <a:p>
             <a:r>
-              <a:t>Micro-Partitions</a:t>
+              <a:t>Clustering Keys</a:t>
             </a:r>
           </a:p>
         </p:txBody>
@@ -18214,32 +18373,32 @@
           <a:lstStyle/>
           <a:p>
             <a:r>
-              <a:t>Storage unit (~16MB compressed)</a:t>
-            </a:r>
-          </a:p>
-          <a:p>
-            <a:r>
-              <a:t>Automatically created</a:t>
-            </a:r>
-          </a:p>
-          <a:p>
-            <a:r>
-              <a:t>Contains metadata (min/max, stats)</a:t>
-            </a:r>
-          </a:p>
-          <a:p>
-            <a:r>
-              <a:t>Enables pruning</a:t>
-            </a:r>
-          </a:p>
-          <a:p>
-            <a:r>
-              <a:t>Immutable structure</a:t>
-            </a:r>
-          </a:p>
-          <a:p>
-            <a:r>
-              <a:t>Core of Snowflake performance</a:t>
+              <a:t>Defines sort order inside micro-partitions</a:t>
+            </a:r>
+          </a:p>
+          <a:p>
+            <a:r>
+              <a:t>Improves partition pruning</a:t>
+            </a:r>
+          </a:p>
+          <a:p>
+            <a:r>
+              <a:t>Reduces data scanned</a:t>
+            </a:r>
+          </a:p>
+          <a:p>
+            <a:r>
+              <a:t>Best for large tables</a:t>
+            </a:r>
+          </a:p>
+          <a:p>
+            <a:r>
+              <a:t>Useful for range filters (dates, IDs)</a:t>
+            </a:r>
+          </a:p>
+          <a:p>
+            <a:r>
+              <a:t>Requires maintenance (reclustering)</a:t>
             </a:r>
           </a:p>
         </p:txBody>
@@ -18285,7 +18444,7 @@
           <a:lstStyle/>
           <a:p>
             <a:r>
-              <a:t>Query Optimization Techniques</a:t>
+              <a:t>Micro-Partitions</a:t>
             </a:r>
           </a:p>
         </p:txBody>
@@ -18306,32 +18465,32 @@
           <a:lstStyle/>
           <a:p>
             <a:r>
-              <a:t>Avoid SELECT *</a:t>
-            </a:r>
-          </a:p>
-          <a:p>
-            <a:r>
-              <a:t>Filter early (WHERE clause)</a:t>
-            </a:r>
-          </a:p>
-          <a:p>
-            <a:r>
-              <a:t>Use proper JOIN conditions</a:t>
-            </a:r>
-          </a:p>
-          <a:p>
-            <a:r>
-              <a:t>Avoid cross joins</a:t>
-            </a:r>
-          </a:p>
-          <a:p>
-            <a:r>
-              <a:t>Use clustering keys</a:t>
-            </a:r>
-          </a:p>
-          <a:p>
-            <a:r>
-              <a:t>Minimize data movement</a:t>
+              <a:t>Storage unit (~16MB compressed)</a:t>
+            </a:r>
+          </a:p>
+          <a:p>
+            <a:r>
+              <a:t>Automatically created</a:t>
+            </a:r>
+          </a:p>
+          <a:p>
+            <a:r>
+              <a:t>Contains metadata (min/max, stats)</a:t>
+            </a:r>
+          </a:p>
+          <a:p>
+            <a:r>
+              <a:t>Enables pruning</a:t>
+            </a:r>
+          </a:p>
+          <a:p>
+            <a:r>
+              <a:t>Immutable structure</a:t>
+            </a:r>
+          </a:p>
+          <a:p>
+            <a:r>
+              <a:t>Core of Snowflake performance</a:t>
             </a:r>
           </a:p>
         </p:txBody>
